--- a/reports/forkcast_presentation.pptx
+++ b/reports/forkcast_presentation.pptx
@@ -518,22 +518,22 @@
                 <c:formatCode>General</c:formatCode>
                 <c:ptCount val="6"/>
                 <c:pt idx="0">
-                  <c:v>81970.72480572911</c:v>
+                  <c:v>81970.72480573482</c:v>
                 </c:pt>
                 <c:pt idx="1">
-                  <c:v>82691.79887494033</c:v>
+                  <c:v>82691.79887493997</c:v>
                 </c:pt>
                 <c:pt idx="2">
-                  <c:v>85403.95691162143</c:v>
+                  <c:v>85403.95691162173</c:v>
                 </c:pt>
                 <c:pt idx="3">
-                  <c:v>79748.89095089414</c:v>
+                  <c:v>79748.89095089765</c:v>
                 </c:pt>
                 <c:pt idx="4">
-                  <c:v>84114.5493443461</c:v>
+                  <c:v>84114.54934434444</c:v>
                 </c:pt>
                 <c:pt idx="5">
-                  <c:v>81952.54284317588</c:v>
+                  <c:v>81952.54284317911</c:v>
                 </c:pt>
               </c:numCache>
             </c:numRef>
@@ -591,22 +591,22 @@
                 <c:formatCode>General</c:formatCode>
                 <c:ptCount val="6"/>
                 <c:pt idx="0">
-                  <c:v>169507.2237612992</c:v>
+                  <c:v>169507.2237613002</c:v>
                 </c:pt>
                 <c:pt idx="1">
-                  <c:v>172829.60225582332</c:v>
+                  <c:v>172829.60225581497</c:v>
                 </c:pt>
                 <c:pt idx="2">
-                  <c:v>178863.56396582752</c:v>
+                  <c:v>178863.56396583328</c:v>
                 </c:pt>
                 <c:pt idx="3">
-                  <c:v>160676.74296592516</c:v>
+                  <c:v>160676.74296592554</c:v>
                 </c:pt>
                 <c:pt idx="4">
-                  <c:v>180116.7653771765</c:v>
+                  <c:v>180116.76537716863</c:v>
                 </c:pt>
                 <c:pt idx="5">
-                  <c:v>169731.17877601308</c:v>
+                  <c:v>169731.17877600604</c:v>
                 </c:pt>
               </c:numCache>
             </c:numRef>

--- a/reports/forkcast_presentation.pptx
+++ b/reports/forkcast_presentation.pptx
@@ -533,7 +533,7 @@
                   <c:v>84114.54934434444</c:v>
                 </c:pt>
                 <c:pt idx="5">
-                  <c:v>81952.54284317911</c:v>
+                  <c:v>82018.04779926244</c:v>
                 </c:pt>
               </c:numCache>
             </c:numRef>
@@ -606,7 +606,7 @@
                   <c:v>180116.76537716863</c:v>
                 </c:pt>
                 <c:pt idx="5">
-                  <c:v>169731.17877600604</c:v>
+                  <c:v>169963.40458385853</c:v>
                 </c:pt>
               </c:numCache>
             </c:numRef>
@@ -4591,7 +4591,7 @@
         <p:spPr>
           <a:xfrm>
             <a:off x="457200" y="1371600"/>
-            <a:ext cx="7680960" cy="3016824"/>
+            <a:ext cx="7680960" cy="3028493"/>
           </a:xfrm>
           <a:prstGeom prst="rect">
             <a:avLst/>
@@ -4615,7 +4615,7 @@
         <p:spPr>
           <a:xfrm>
             <a:off x="8229600" y="1463040"/>
-            <a:ext cx="3749039" cy="1633732"/>
+            <a:ext cx="3749039" cy="1615128"/>
           </a:xfrm>
           <a:prstGeom prst="rect">
             <a:avLst/>
@@ -4911,7 +4911,7 @@
         <p:spPr>
           <a:xfrm>
             <a:off x="457200" y="1463040"/>
-            <a:ext cx="7772400" cy="3471115"/>
+            <a:ext cx="7772400" cy="3490899"/>
           </a:xfrm>
           <a:prstGeom prst="rect">
             <a:avLst/>
@@ -5198,7 +5198,7 @@
                 </a:solidFill>
                 <a:latin typeface="Calibri"/>
               </a:rPr>
-              <a:t>Базировать план на медиане взвешенного прогноза рынка: 81 953 шт. за 2026Q2–2027Q1 (−1% к 2025 г.), держать «коридор» мощностей P10–P90: 73 175–92 688 шт. Объём выпуска по сегментам — по правилу newsvendor (квантиль 71%), см. лист «План_СИЛАНТ_4кв».</a:t>
+              <a:t>Базировать план на медиане взвешенного прогноза рынка: 82 018 шт. за 2026Q2–2027Q1 (−1% к 2025 г.), держать «коридор» мощностей P10–P90: 73 294–92 710 шт. Объём выпуска по сегментам — по правилу newsvendor (квантиль 71%), см. лист «План_СИЛАНТ_4кв».</a:t>
             </a:r>
           </a:p>
           <a:p>
@@ -5248,7 +5248,7 @@
                 </a:solidFill>
                 <a:latin typeface="Calibri"/>
               </a:rPr>
-              <a:t>Сегмент ДВС сократился на 48% в 2025 г. и восстанавливается медленнее рынка (прогноз 20 790 шт. за 4 кв.). Рекомендуется сборка под заказ, унификация платформ 1,5–3,5 т и минимальный страховой запас; расширение мощностей ДВС — только при переходе рынка к оптимистичному сценарию.</a:t>
+              <a:t>Сегмент ДВС сократился на 48% в 2025 г. и восстанавливается медленнее рынка (прогноз 20 792 шт. за 4 кв.). Рекомендуется сборка под заказ, унификация платформ 1,5–3,5 т и минимальный страховой запас; расширение мощностей ДВС — только при переходе рынка к оптимистичному сценарию.</a:t>
             </a:r>
           </a:p>
           <a:p>
@@ -6531,7 +6531,7 @@
                 </a:solidFill>
                 <a:latin typeface="Calibri"/>
               </a:rPr>
-              <a:t>81 953</a:t>
+              <a:t>82 018</a:t>
             </a:r>
           </a:p>
         </p:txBody>
@@ -6566,7 +6566,7 @@
                 </a:solidFill>
                 <a:latin typeface="Calibri"/>
               </a:rPr>
-              <a:t>прогноз на 4 кв. (2026Q2–2027Q1), P10–P90: 73 175–92 688</a:t>
+              <a:t>прогноз на 4 кв. (2026Q2–2027Q1), P10–P90: 73 294–92 710</a:t>
             </a:r>
           </a:p>
         </p:txBody>
@@ -7444,7 +7444,7 @@
         <p:spPr>
           <a:xfrm>
             <a:off x="457200" y="1371600"/>
-            <a:ext cx="6949440" cy="3569169"/>
+            <a:ext cx="6949440" cy="3518890"/>
           </a:xfrm>
           <a:prstGeom prst="rect">
             <a:avLst/>
@@ -8518,7 +8518,7 @@
                 </a:solidFill>
                 <a:latin typeface="Calibri"/>
               </a:rPr>
-              <a:t>Прогноз рынка: 81 953 шт. за 4 квартала</a:t>
+              <a:t>Прогноз рынка: 82 018 шт. за 4 квартала</a:t>
             </a:r>
           </a:p>
         </p:txBody>
@@ -8553,7 +8553,7 @@
                 </a:solidFill>
                 <a:latin typeface="Calibri"/>
               </a:rPr>
-              <a:t>Взвешенный сценарий; 80%-интервал 73 175–92 688; на 8 кв. — 169 731 шт.</a:t>
+              <a:t>Взвешенный сценарий; 80%-интервал 73 294–92 710; на 8 кв. — 169 963 шт.</a:t>
             </a:r>
           </a:p>
         </p:txBody>
@@ -8645,7 +8645,7 @@
         <p:spPr>
           <a:xfrm>
             <a:off x="457200" y="1371600"/>
-            <a:ext cx="8066953" cy="4937760"/>
+            <a:ext cx="8158960" cy="4937760"/>
           </a:xfrm>
           <a:prstGeom prst="rect">
             <a:avLst/>
@@ -9237,7 +9237,7 @@
         <p:spPr>
           <a:xfrm>
             <a:off x="457200" y="1371600"/>
-            <a:ext cx="7757062" cy="4937760"/>
+            <a:ext cx="7743426" cy="4937760"/>
           </a:xfrm>
           <a:prstGeom prst="rect">
             <a:avLst/>
@@ -9462,7 +9462,7 @@
         <p:spPr>
           <a:xfrm>
             <a:off x="457200" y="1325880"/>
-            <a:ext cx="11247120" cy="4806462"/>
+            <a:ext cx="11247120" cy="4798501"/>
           </a:xfrm>
           <a:prstGeom prst="rect">
             <a:avLst/>
